--- a/presentations/Fintech_PPOB_Transaction_Operations_Analytics.pptx
+++ b/presentations/Fintech_PPOB_Transaction_Operations_Analytics.pptx
@@ -3203,7 +3203,7 @@
               </a:defRPr>
             </a:pPr>
             <a:r>
-              <a:t>Volume Pareto, SLA Failure Bottlenecks, Peak Load Dynamics &amp; Smart Routing Strategy</a:t>
+              <a:t>Volume Concentration, Biller Failure Bottlenecks, Peak Load Patterns &amp; Vendor Risk</a:t>
             </a:r>
           </a:p>
           <a:p>
@@ -3215,7 +3215,7 @@
               </a:defRPr>
             </a:pPr>
             <a:r>
-              <a:t>Dataset: 316,376 Live Operational Transactions | Tech Stack: SQL, Python (Pandas/Seaborn), Tableau | Author: Novaldi Ramadhan Waluyo</a:t>
+              <a:t>Dataset: 316,376 masked transactions (1, 5 and 6 Aug 2026) | Tech Stack: SQL, Python (pandas/Seaborn), Power BI | Author: Novaldi Ramadhan Waluyo</a:t>
             </a:r>
           </a:p>
         </p:txBody>
@@ -3444,7 +3444,7 @@
               </a:defRPr>
             </a:pPr>
             <a:r>
-              <a:t>Executive Summary: Operational Performance &amp; SLA Health</a:t>
+              <a:t>Executive Summary: Operational Performance</a:t>
             </a:r>
           </a:p>
         </p:txBody>
@@ -3732,7 +3732,7 @@
               </a:defRPr>
             </a:pPr>
             <a:r>
-              <a:t>FAILURE SLA RISK</a:t>
+              <a:t>FAILURE RATE</a:t>
             </a:r>
           </a:p>
           <a:p>
@@ -3881,8 +3881,8 @@
         </p:blipFill>
         <p:spPr>
           <a:xfrm>
-            <a:off x="731520" y="2834640"/>
-            <a:ext cx="5029200" cy="5584843"/>
+            <a:off x="914400" y="2834640"/>
+            <a:ext cx="3141041" cy="3566160"/>
           </a:xfrm>
           <a:prstGeom prst="rect">
             <a:avLst/>
@@ -3982,7 +3982,7 @@
               </a:defRPr>
             </a:pPr>
             <a:r>
-              <a:t>• High Volume Baseline: System processed 316.3k transactions with an overall 89.84% success rate.</a:t>
+              <a:t>• Volume Baseline: 316.4k transactions over three days with an overall 89.84% success rate.</a:t>
             </a:r>
           </a:p>
           <a:p>
@@ -3997,7 +3997,7 @@
               </a:defRPr>
             </a:pPr>
             <a:r>
-              <a:t>• Critical Failure Concentration: Over 60.9% of all system failures originate from just two vendors (Biller_29 &amp; Biller_26), causing 19,585 failed user requests.</a:t>
+              <a:t>• Failure Concentration: 60.9% of all failures (19,585) come from two billers, Biller_29 and Biller_26, which handle only 19.6% of traffic.</a:t>
             </a:r>
           </a:p>
           <a:p>
@@ -4012,7 +4012,7 @@
               </a:defRPr>
             </a:pPr>
             <a:r>
-              <a:t>• High-Volume Product Risks: Key top-tier products like TNP23 (22.3k tx) suffer a 22.75% failure rate, severely hurting user trust and GMV conversion.</a:t>
+              <a:t>• High-Volume Product Risk: TNP23, the #3 SKU by volume (22.3k tx), fails 22.75% of the time.</a:t>
             </a:r>
           </a:p>
           <a:p>
@@ -4027,7 +4027,7 @@
               </a:defRPr>
             </a:pPr>
             <a:r>
-              <a:t>• Product Catalog Outliers: Certain micro-SKUs like XDF1000 face a catastrophic 58.73% failure rate, indicating severe API misconfiguration or upstream disconnection.</a:t>
+              <a:t>• Broken Denominations: XDF1000 (6.2k tx) fails 58.73% of the time, XDF2000 53.47% and XDF3000 48.28%, pointing to an upstream catalogue or denomination problem.</a:t>
             </a:r>
           </a:p>
           <a:p>
@@ -4042,7 +4042,7 @@
               </a:defRPr>
             </a:pPr>
             <a:r>
-              <a:t>• Peak Evening Strain: Transactions peak between 17:00 - 19:00 WIB (up to 24,787 tx/hr), correlating with vendor timeout spikes.</a:t>
+              <a:t>• Data Quality: 1,923 transactions (0.6%) used lower-case product codes such as xdg1. They failed 34.9% of the time vs 10.0% for standard codes. Codes were upper-cased before analysis.</a:t>
             </a:r>
           </a:p>
         </p:txBody>
@@ -4130,7 +4130,7 @@
               </a:defRPr>
             </a:pPr>
             <a:r>
-              <a:t>Product Volume Distribution: Pareto 80/20 Concentration</a:t>
+              <a:t>Product Volume Distribution: Pareto Concentration</a:t>
             </a:r>
           </a:p>
         </p:txBody>
@@ -4152,7 +4152,7 @@
         <p:spPr>
           <a:xfrm>
             <a:off x="731520" y="1371600"/>
-            <a:ext cx="5943600" cy="2948479"/>
+            <a:ext cx="5943600" cy="2946827"/>
           </a:xfrm>
           <a:prstGeom prst="rect">
             <a:avLst/>
@@ -4237,7 +4237,7 @@
               </a:defRPr>
             </a:pPr>
             <a:r>
-              <a:t>Top Revenue Drivers (Volume Analysis)</a:t>
+              <a:t>Top Volume Drivers</a:t>
             </a:r>
           </a:p>
           <a:p>
@@ -4252,7 +4252,7 @@
               </a:defRPr>
             </a:pPr>
             <a:r>
-              <a:t>• Heavy Pareto Skew: Top 5 products generate 57.0% of total volume (180.4k tx). Top 15 products represent 82.4% of total traffic.</a:t>
+              <a:t>• Heavy Pareto Skew: The top 5 SKUs carry 57.3% of volume (181.3k tx). It takes 20 SKUs to pass 80% (81.4%).</a:t>
             </a:r>
           </a:p>
           <a:p>
@@ -4267,7 +4267,7 @@
               </a:defRPr>
             </a:pPr>
             <a:r>
-              <a:t>• Leading Star SKU (SB20): SB20 alone commands 79,184 transactions (25.03% market share) with a healthy 94.70% success rate.</a:t>
+              <a:t>• Leading SKU (SB20): 79,184 transactions (25.0% of volume) with a 94.70% success rate.</a:t>
             </a:r>
           </a:p>
           <a:p>
@@ -4282,7 +4282,7 @@
               </a:defRPr>
             </a:pPr>
             <a:r>
-              <a:t>• Runner Up (XDG1): XDG1 delivers 40,640 transactions (12.85% share) with a resilient 97.05% success rate.</a:t>
+              <a:t>• Runner-up (XDG1): 41,492 transactions (13.1% of volume) with a 96.47% success rate.</a:t>
             </a:r>
           </a:p>
           <a:p>
@@ -4312,7 +4312,7 @@
               </a:defRPr>
             </a:pPr>
             <a:r>
-              <a:t>• Operational Implication: Prioritizing reliability for just the top 3 SKUs safeguards ~45% of total business revenue.</a:t>
+              <a:t>• Implication: The top 3 SKUs carry 45.2% of volume, so close monitoring of just three products protects almost half of all transactions.</a:t>
             </a:r>
           </a:p>
         </p:txBody>
@@ -4422,7 +4422,7 @@
         <p:spPr>
           <a:xfrm>
             <a:off x="731520" y="1371600"/>
-            <a:ext cx="5669280" cy="3381709"/>
+            <a:ext cx="5669280" cy="3378662"/>
           </a:xfrm>
           <a:prstGeom prst="rect">
             <a:avLst/>
@@ -4446,7 +4446,7 @@
         <p:spPr>
           <a:xfrm>
             <a:off x="6492240" y="1371600"/>
-            <a:ext cx="4937760" cy="2447436"/>
+            <a:ext cx="4937760" cy="2448133"/>
           </a:xfrm>
           <a:prstGeom prst="rect">
             <a:avLst/>
@@ -4543,11 +4543,11 @@
               </a:defRPr>
             </a:pPr>
             <a:r>
-              <a:t>1. XDF1000 &amp; XDF500: Extreme failure rates (58.73% and 32.26%) indicate upstream vendor denomination mismatch or depleted balance on partner switchboards.</a:t>
+              <a:t>1. XDF series (Biller_29): XDF1000, XDF2000 and XDF3000 fail 58.73%, 53.47% and 48.28% of the time, which points to a denomination mismatch or a stock/balance problem upstream.</a:t>
             </a:r>
             <a:br/>
             <a:r>
-              <a:t>2. TNP Series (TNP23 &amp; TNP13): High demand products with 22.75% to 35.00% fail rates need immediate dynamic failover to alternative billers.</a:t>
+              <a:t>2. TNP series (Biller_26): TNP13 (37.35%) and TNP23 (22.75%) are high-demand products with high failure. No other biller carries them in this data, so a backup supplier is needed before any failover.</a:t>
             </a:r>
           </a:p>
         </p:txBody>
@@ -4635,7 +4635,7 @@
               </a:defRPr>
             </a:pPr>
             <a:r>
-              <a:t>Vendor SLA Matrix: Biller Volume vs Failure Concentration</a:t>
+              <a:t>Biller Performance: Volume vs Failure Concentration</a:t>
             </a:r>
           </a:p>
         </p:txBody>
@@ -4657,7 +4657,7 @@
         <p:spPr>
           <a:xfrm>
             <a:off x="731520" y="1371600"/>
-            <a:ext cx="7315200" cy="3247886"/>
+            <a:ext cx="7315200" cy="3247107"/>
           </a:xfrm>
           <a:prstGeom prst="rect">
             <a:avLst/>
@@ -4742,7 +4742,7 @@
               </a:defRPr>
             </a:pPr>
             <a:r>
-              <a:t>Vendor SLA Insights</a:t>
+              <a:t>Biller Insights</a:t>
             </a:r>
           </a:p>
           <a:p>
@@ -4757,7 +4757,7 @@
               </a:defRPr>
             </a:pPr>
             <a:r>
-              <a:t>• Biller_27 Dominance: Handles 50.4% (159.4k tx) with solid 94.3% SLA. Core backbone.</a:t>
+              <a:t>• Biller_27 Backbone: Handles 50.4% of traffic (159.4k tx) at a 94.3% success rate.</a:t>
             </a:r>
           </a:p>
           <a:p>
@@ -4772,7 +4772,7 @@
               </a:defRPr>
             </a:pPr>
             <a:r>
-              <a:t>• Biller_29 Alert: 60.6% success rate (39.38% fail rate!). Contributes 31.4% of all system errors.</a:t>
+              <a:t>• Biller_29 Alert: 60.6% success rate (39.38% failure rate); 31.4% of all failures.</a:t>
             </a:r>
           </a:p>
           <a:p>
@@ -4787,7 +4787,7 @@
               </a:defRPr>
             </a:pPr>
             <a:r>
-              <a:t>• Biller_26 Bottleneck: 73.96% success rate (26.04% fail). Contributes 29.5% of all errors.</a:t>
+              <a:t>• Biller_26 Bottleneck: 73.96% success rate (26.04% failure rate); 29.5% of all failures.</a:t>
             </a:r>
           </a:p>
           <a:p>
@@ -4802,7 +4802,7 @@
               </a:defRPr>
             </a:pPr>
             <a:r>
-              <a:t>• Vendor Risk: Together, Biller_29 &amp; 26 generate 60.9% of system failures despite only 19.6% of volume!</a:t>
+              <a:t>• Vendor Risk: Together they cause 60.9% of failures on only 19.6% of volume.</a:t>
             </a:r>
           </a:p>
           <a:p>
@@ -4817,7 +4817,7 @@
               </a:defRPr>
             </a:pPr>
             <a:r>
-              <a:t>• Action Required: Institute SLA penalty clauses and reroute traffic dynamically when vendor fail rate exceeds 10%.</a:t>
+              <a:t>• No Backup Route: Their SKUs are not served by any other biller in the data (2 of 19,585 failures), so rerouting first needs a new supplier.</a:t>
             </a:r>
           </a:p>
         </p:txBody>
@@ -4927,7 +4927,7 @@
         <p:spPr>
           <a:xfrm>
             <a:off x="731520" y="1371600"/>
-            <a:ext cx="6858000" cy="3134680"/>
+            <a:ext cx="6858000" cy="3136605"/>
           </a:xfrm>
           <a:prstGeom prst="rect">
             <a:avLst/>
@@ -5027,7 +5027,7 @@
               </a:defRPr>
             </a:pPr>
             <a:r>
-              <a:t>• Evening Peak (17:00 - 19:00): Peak volume hits at 18:00 WIB (24,787 tx/hr), followed by 19:00 WIB (21,792 tx/hr). Represents 21.3% of daily traffic.</a:t>
+              <a:t>• Evening Peak (17:00 - 19:00): 18:00 WIB is the busiest hour: 24,787 transactions over the three days (~8.3k per day). 17:00-19:00 carries 21.3% of volume.</a:t>
             </a:r>
           </a:p>
           <a:p>
@@ -5042,7 +5042,7 @@
               </a:defRPr>
             </a:pPr>
             <a:r>
-              <a:t>• Morning Rush (07:00 - 09:00): Sustained high load of ~20,000 tx/hr during morning commute and opening hours.</a:t>
+              <a:t>• Morning Load (07:00 - 09:00): About 6.7k transactions per hour per day.</a:t>
             </a:r>
           </a:p>
           <a:p>
@@ -5057,7 +5057,7 @@
               </a:defRPr>
             </a:pPr>
             <a:r>
-              <a:t>• Off-Peak Trough (01:00 - 04:00): Lowest traffic occurs between 02:00-03:00 WIB (&lt;1,600 tx/hr). Ideal maintenance and batch reconciliation window.</a:t>
+              <a:t>• Off-Peak (01:00 - 04:00): 02:00-03:00 WIB is the quietest window (~530 transactions per hour per day), suitable for batch reconciliation.</a:t>
             </a:r>
           </a:p>
           <a:p>
@@ -5072,7 +5072,7 @@
               </a:defRPr>
             </a:pPr>
             <a:r>
-              <a:t>• Load-Failure Correlation: Failure rates remain steady around 9.5% - 11.0% across all hours, indicating errors are vendor/SKU-systemic rather than pure server congestion.</a:t>
+              <a:t>• Load vs Failure: Hourly failure rate ranges from 7.0% to 13.4% and does not rise with volume (18:00 is 9.1%), so failures are driven by billers and SKUs, not load.</a:t>
             </a:r>
           </a:p>
         </p:txBody>
@@ -5267,7 +5267,7 @@
             </a:r>
             <a:br/>
             <a:r>
-              <a:t>• Risk: Systemic biller failures directly degrade partner SLA, risking B2B churn and SLA penalty clawbacks.</a:t>
+              <a:t>• Risk: biller failures pass straight through to partners and can affect partner retention.</a:t>
             </a:r>
           </a:p>
         </p:txBody>
@@ -5366,15 +5366,15 @@
             </a:r>
             <a:br/>
             <a:r>
-              <a:t>• Over 32,150 failed transactions created customer friction and support tickets.</a:t>
+              <a:t>• 32,150 failed transactions, each a failed purchase attempt for a customer.</a:t>
             </a:r>
             <a:br/>
             <a:r>
-              <a:t>• Repeat failures cause users to abandon checkout or switch to competitor platforms.</a:t>
+              <a:t>• Repeated failures risk customers abandoning the purchase or switching apps.</a:t>
             </a:r>
             <a:br/>
             <a:r>
-              <a:t>• Preserving customer lifetime value requires immediate auto-retry and real-time status transparency.</a:t>
+              <a:t>• Clear status messages and safe retries reduce that friction.</a:t>
             </a:r>
           </a:p>
         </p:txBody>
@@ -5457,7 +5457,7 @@
               </a:defRPr>
             </a:pPr>
             <a:r>
-              <a:t>Revenue Opportunity</a:t>
+              <a:t>Recovery Potential (illustrative)</a:t>
             </a:r>
           </a:p>
           <a:p>
@@ -5469,15 +5469,15 @@
               </a:defRPr>
             </a:pPr>
             <a:r>
-              <a:t>• Recovering 70% of failed transactions via Smart Fallback Routing would salvage ~22,500 transactions per 3-day window.</a:t>
+              <a:t>• Every 10% of failures recovered is about 3,200 transactions per 3-day window.</a:t>
             </a:r>
             <a:br/>
             <a:r>
-              <a:t>• Annualized Potential: Recovers ~2.7M transactions and protects millions in GMV.</a:t>
+              <a:t>• The two worst billers account for 19,585 failures, the largest single lever.</a:t>
             </a:r>
             <a:br/>
             <a:r>
-              <a:t>• Drastically cuts customer service ticket volume related to 'Pending/Failed' recharges.</a:t>
+              <a:t>• Revenue impact cannot be estimated: the data has no transaction value.</a:t>
             </a:r>
           </a:p>
         </p:txBody>
@@ -5648,7 +5648,7 @@
               </a:defRPr>
             </a:pPr>
             <a:r>
-              <a:t>1. Dynamic Smart Routing &amp; Failover</a:t>
+              <a:t>1. Backup Biller &amp; Health-Based Routing</a:t>
             </a:r>
           </a:p>
           <a:p>
@@ -5660,7 +5660,7 @@
               </a:defRPr>
             </a:pPr>
             <a:r>
-              <a:t>Implement real-time health checks on upstream billers. If Biller_29 or Biller_26 failure rate exceeds 10% in a 5-minute rolling window, automatically route traffic to secondary backup billers (e.g. Biller_27 or Biller_19).</a:t>
+              <a:t>Onboard a second supplier for the XDF and TNP product lines (none exists in this data). Then switch traffic automatically when a biller's failure rate passes 10% in a 5-minute window.</a:t>
             </a:r>
           </a:p>
         </p:txBody>
@@ -5755,7 +5755,7 @@
               </a:defRPr>
             </a:pPr>
             <a:r>
-              <a:t>For transient errors on popular products (TNP23, STU15), implement a 3-attempt automated background retry queue before returning a hard 'FAILED' status to the end user.</a:t>
+              <a:t>For transient errors on top SKUs (TNP23, STU15), retry up to 3 times with backoff before returning a final 'FAILED' status to the customer.</a:t>
             </a:r>
           </a:p>
         </p:txBody>
@@ -5838,7 +5838,7 @@
               </a:defRPr>
             </a:pPr>
             <a:r>
-              <a:t>3. Biller SLA Renegotiation &amp; Vendor Penalties</a:t>
+              <a:t>3. Biller Performance Targets</a:t>
             </a:r>
           </a:p>
           <a:p>
@@ -5850,7 +5850,7 @@
               </a:defRPr>
             </a:pPr>
             <a:r>
-              <a:t>Hold Biller_29 and Biller_26 accountable for breaching 95% SLA thresholds. Enforce contract penalty rebates and set minimum balance monitoring alerts.</a:t>
+              <a:t>Agree a success-rate target (e.g. 95%) with Biller_29 and Biller_26, review it weekly, and add deposit-balance alerts.</a:t>
             </a:r>
           </a:p>
         </p:txBody>
@@ -5933,7 +5933,7 @@
               </a:defRPr>
             </a:pPr>
             <a:r>
-              <a:t>4. Peak Load Capacity &amp; Queue Provisioning</a:t>
+              <a:t>4. Peak-Hour Monitoring</a:t>
             </a:r>
           </a:p>
           <a:p>
@@ -5945,7 +5945,7 @@
               </a:defRPr>
             </a:pPr>
             <a:r>
-              <a:t>Scale gateway worker pods by 35% between 16:30 and 20:00 WIB daily to handle peak bursts of 24.7k+ tx/hr without queue timeouts.</a:t>
+              <a:t>Watch failure rate and latency closely between 16:30 and 20:00 WIB. The data shows no capacity problem yet, so any scaling should follow latency data.</a:t>
             </a:r>
           </a:p>
         </p:txBody>
@@ -6131,7 +6131,7 @@
               </a:defRPr>
             </a:pPr>
             <a:r>
-              <a:t>• Indexed SQLite schema (`idx_date`, `idx_status`, `idx_biller`).</a:t>
+              <a:t>• Indexed SQLite schema (`idx_trans_date`, `idx_status`, `idx_biller_name`).</a:t>
             </a:r>
           </a:p>
           <a:p>
@@ -6176,7 +6176,7 @@
               </a:defRPr>
             </a:pPr>
             <a:r>
-              <a:t>• Instant query response on 316k+ records.</a:t>
+              <a:t>• Product codes normalised to upper case (318 raw codes, 294 real SKUs).</a:t>
             </a:r>
           </a:p>
         </p:txBody>
@@ -6417,7 +6417,7 @@
               </a:defRPr>
             </a:pPr>
             <a:r>
-              <a:t>• Pareto 80/20 product revenue concentration.</a:t>
+              <a:t>• Pareto product volume concentration.</a:t>
             </a:r>
           </a:p>
           <a:p>
@@ -6432,7 +6432,7 @@
               </a:defRPr>
             </a:pPr>
             <a:r>
-              <a:t>• Vendor SLA gap analysis &amp; failure concentration modeling.</a:t>
+              <a:t>• Biller failure concentration analysis.</a:t>
             </a:r>
           </a:p>
           <a:p>
@@ -6447,7 +6447,7 @@
               </a:defRPr>
             </a:pPr>
             <a:r>
-              <a:t>• 24-Hour peak load capacity sizing.</a:t>
+              <a:t>• 24-hour load and failure profile.</a:t>
             </a:r>
           </a:p>
           <a:p>
@@ -6462,7 +6462,7 @@
               </a:defRPr>
             </a:pPr>
             <a:r>
-              <a:t>• Strategic roadmap with estimated 2.7M annualized transaction recovery.</a:t>
+              <a:t>• Recommendations limited to what the data can support.</a:t>
             </a:r>
           </a:p>
         </p:txBody>

--- a/presentations/Fintech_PPOB_Transaction_Operations_Analytics.pptx
+++ b/presentations/Fintech_PPOB_Transaction_Operations_Analytics.pptx
@@ -3882,7 +3882,7 @@
         <p:spPr>
           <a:xfrm>
             <a:off x="914400" y="2834640"/>
-            <a:ext cx="3141041" cy="3566160"/>
+            <a:ext cx="3208917" cy="3566160"/>
           </a:xfrm>
           <a:prstGeom prst="rect">
             <a:avLst/>
@@ -4152,7 +4152,7 @@
         <p:spPr>
           <a:xfrm>
             <a:off x="731520" y="1371600"/>
-            <a:ext cx="5943600" cy="2946827"/>
+            <a:ext cx="5943600" cy="3362720"/>
           </a:xfrm>
           <a:prstGeom prst="rect">
             <a:avLst/>
@@ -4252,7 +4252,7 @@
               </a:defRPr>
             </a:pPr>
             <a:r>
-              <a:t>• Heavy Pareto Skew: The top 5 SKUs carry 57.3% of volume (181.3k tx). It takes 20 SKUs to pass 80% (81.4%).</a:t>
+              <a:t>• Heavy Pareto Skew: The top 5 SKUs carry 57.3% of volume (181.3k tx). 19 of 294 SKUs are enough to pass 80% (80.3%).</a:t>
             </a:r>
           </a:p>
           <a:p>
@@ -4422,7 +4422,7 @@
         <p:spPr>
           <a:xfrm>
             <a:off x="731520" y="1371600"/>
-            <a:ext cx="5669280" cy="3378662"/>
+            <a:ext cx="5669280" cy="3869458"/>
           </a:xfrm>
           <a:prstGeom prst="rect">
             <a:avLst/>
@@ -4446,7 +4446,7 @@
         <p:spPr>
           <a:xfrm>
             <a:off x="6492240" y="1371600"/>
-            <a:ext cx="4937760" cy="2448133"/>
+            <a:ext cx="4937760" cy="2712832"/>
           </a:xfrm>
           <a:prstGeom prst="rect">
             <a:avLst/>
@@ -4657,7 +4657,7 @@
         <p:spPr>
           <a:xfrm>
             <a:off x="731520" y="1371600"/>
-            <a:ext cx="7315200" cy="3247107"/>
+            <a:ext cx="7315200" cy="3851877"/>
           </a:xfrm>
           <a:prstGeom prst="rect">
             <a:avLst/>
@@ -4927,7 +4927,7 @@
         <p:spPr>
           <a:xfrm>
             <a:off x="731520" y="1371600"/>
-            <a:ext cx="6858000" cy="3136605"/>
+            <a:ext cx="6858000" cy="3574135"/>
           </a:xfrm>
           <a:prstGeom prst="rect">
             <a:avLst/>
